--- a/Tp8/Control_P_Lazo_Cerrado.pptx
+++ b/Tp8/Control_P_Lazo_Cerrado.pptx
@@ -1706,10 +1706,10 @@
       </p:sp>
       <p:pic>
         <p:nvPicPr>
-          <p:cNvPr id="35" name="Imagen 34">
+          <p:cNvPr id="6" name="Imagen 5">
             <a:extLst>
               <a:ext uri="{FF2B5EF4-FFF2-40B4-BE49-F238E27FC236}">
-                <a16:creationId xmlns:a16="http://schemas.microsoft.com/office/drawing/2014/main" id="{73F55FB0-7122-41D9-9BED-E55181C725FD}"/>
+                <a16:creationId xmlns:a16="http://schemas.microsoft.com/office/drawing/2014/main" id="{ABD06B8B-A646-44FD-B0D7-40E53B7F5E98}"/>
               </a:ext>
             </a:extLst>
           </p:cNvPr>
@@ -1726,8 +1726,8 @@
         </p:blipFill>
         <p:spPr>
           <a:xfrm>
-            <a:off x="0" y="1845525"/>
-            <a:ext cx="9144000" cy="2239849"/>
+            <a:off x="91440" y="1707439"/>
+            <a:ext cx="8957733" cy="2830574"/>
           </a:xfrm>
           <a:prstGeom prst="rect">
             <a:avLst/>
